--- a/Cap3_AirPassengers/1_ProjectStatement/Capstone 3 - Problem_Statement_Worksheet.pptx
+++ b/Cap3_AirPassengers/1_ProjectStatement/Capstone 3 - Problem_Statement_Worksheet.pptx
@@ -257,7 +257,7 @@
       </p15:sldGuideLst>
     </p:ext>
     <p:ext uri="http://customooxmlschemas.google.com/">
-      <go:slidesCustomData xmlns="" xmlns:mc="http://schemas.openxmlformats.org/markup-compatibility/2006" xmlns:mv="urn:schemas-microsoft-com:mac:vml" xmlns:c="http://schemas.openxmlformats.org/drawingml/2006/chart" xmlns:dgm="http://schemas.openxmlformats.org/drawingml/2006/diagram" xmlns:o="urn:schemas-microsoft-com:office:office" xmlns:v="urn:schemas-microsoft-com:vml" xmlns:pvml="urn:schemas-microsoft-com:office:powerpoint" xmlns:com="http://schemas.openxmlformats.org/drawingml/2006/compatibility" xmlns:p14="http://schemas.microsoft.com/office/powerpoint/2010/main" xmlns:p15="http://schemas.microsoft.com/office/powerpoint/2012/main" xmlns:go="http://customooxmlschemas.google.com/" r:id="rId7" roundtripDataSignature="AMtx7mjdo7FECp685JsX7/4pIVeoAktjNA=="/>
+      <go:slidesCustomData xmlns:go="http://customooxmlschemas.google.com/" xmlns:p15="http://schemas.microsoft.com/office/powerpoint/2012/main" xmlns:p14="http://schemas.microsoft.com/office/powerpoint/2010/main" xmlns:com="http://schemas.openxmlformats.org/drawingml/2006/compatibility" xmlns:pvml="urn:schemas-microsoft-com:office:powerpoint" xmlns:v="urn:schemas-microsoft-com:vml" xmlns:o="urn:schemas-microsoft-com:office:office" xmlns:dgm="http://schemas.openxmlformats.org/drawingml/2006/diagram" xmlns:c="http://schemas.openxmlformats.org/drawingml/2006/chart" xmlns:mv="urn:schemas-microsoft-com:mac:vml" xmlns:mc="http://schemas.openxmlformats.org/markup-compatibility/2006" xmlns="" r:id="rId7" roundtripDataSignature="AMtx7mjdo7FECp685JsX7/4pIVeoAktjNA=="/>
     </p:ext>
   </p:extLst>
 </p:presentation>
@@ -3423,8 +3423,8 @@
         </p:nvSpPr>
         <p:spPr>
           <a:xfrm>
-            <a:off x="137949" y="1019969"/>
-            <a:ext cx="4344156" cy="5389795"/>
+            <a:off x="137949" y="1327031"/>
+            <a:ext cx="4344156" cy="5082733"/>
           </a:xfrm>
           <a:prstGeom prst="rect">
             <a:avLst/>
@@ -3485,8 +3485,8 @@
         </p:nvSpPr>
         <p:spPr>
           <a:xfrm>
-            <a:off x="4587388" y="1019974"/>
-            <a:ext cx="4344156" cy="5389790"/>
+            <a:off x="4587388" y="1327036"/>
+            <a:ext cx="4344156" cy="5082728"/>
           </a:xfrm>
           <a:prstGeom prst="rect">
             <a:avLst/>
@@ -3547,7 +3547,7 @@
         </p:nvSpPr>
         <p:spPr>
           <a:xfrm>
-            <a:off x="218936" y="1040155"/>
+            <a:off x="218936" y="1327031"/>
             <a:ext cx="288315" cy="288315"/>
           </a:xfrm>
           <a:prstGeom prst="rect">
@@ -3615,7 +3615,7 @@
         </p:nvSpPr>
         <p:spPr>
           <a:xfrm>
-            <a:off x="4668375" y="1055541"/>
+            <a:off x="4668375" y="1342417"/>
             <a:ext cx="288315" cy="288315"/>
           </a:xfrm>
           <a:prstGeom prst="rect">
@@ -3683,7 +3683,7 @@
         </p:nvSpPr>
         <p:spPr>
           <a:xfrm>
-            <a:off x="601195" y="1072209"/>
+            <a:off x="601195" y="1359085"/>
             <a:ext cx="3597454" cy="224203"/>
           </a:xfrm>
           <a:prstGeom prst="rect">
@@ -3749,7 +3749,7 @@
         </p:nvSpPr>
         <p:spPr>
           <a:xfrm>
-            <a:off x="5050634" y="1087595"/>
+            <a:off x="5050634" y="1374471"/>
             <a:ext cx="3597454" cy="224203"/>
           </a:xfrm>
           <a:prstGeom prst="rect">
@@ -3815,7 +3815,7 @@
         </p:nvSpPr>
         <p:spPr>
           <a:xfrm>
-            <a:off x="4668375" y="2832768"/>
+            <a:off x="4668375" y="3119644"/>
             <a:ext cx="288315" cy="288315"/>
           </a:xfrm>
           <a:prstGeom prst="rect">
@@ -3883,7 +3883,7 @@
         </p:nvSpPr>
         <p:spPr>
           <a:xfrm>
-            <a:off x="218936" y="2629730"/>
+            <a:off x="218936" y="2916606"/>
             <a:ext cx="288315" cy="288315"/>
           </a:xfrm>
           <a:prstGeom prst="rect">
@@ -3951,7 +3951,7 @@
         </p:nvSpPr>
         <p:spPr>
           <a:xfrm>
-            <a:off x="601195" y="2671514"/>
+            <a:off x="601195" y="2958390"/>
             <a:ext cx="3597454" cy="224203"/>
           </a:xfrm>
           <a:prstGeom prst="rect">
@@ -4017,7 +4017,7 @@
         </p:nvSpPr>
         <p:spPr>
           <a:xfrm>
-            <a:off x="5050634" y="2864824"/>
+            <a:off x="5050634" y="3151700"/>
             <a:ext cx="3597454" cy="224203"/>
           </a:xfrm>
           <a:prstGeom prst="rect">
@@ -4254,7 +4254,7 @@
               <a:buNone/>
             </a:pPr>
             <a:r>
-              <a:rPr lang="en-AU" sz="1428" b="0" i="0" u="none" strike="noStrike" cap="none">
+              <a:rPr lang="en-AU" sz="1428" b="0" i="0" u="none" strike="noStrike" cap="none" dirty="0">
                 <a:solidFill>
                   <a:schemeClr val="dk1"/>
                 </a:solidFill>
@@ -4265,7 +4265,7 @@
               </a:rPr>
               <a:t>Scope of solution space </a:t>
             </a:r>
-            <a:endParaRPr sz="1400" b="0" i="0" u="none" strike="noStrike" cap="none">
+            <a:endParaRPr sz="1400" b="0" i="0" u="none" strike="noStrike" cap="none" dirty="0">
               <a:solidFill>
                 <a:srgbClr val="000000"/>
               </a:solidFill>
@@ -4359,7 +4359,7 @@
         </p:nvSpPr>
         <p:spPr>
           <a:xfrm>
-            <a:off x="143108" y="1324822"/>
+            <a:off x="143108" y="1611698"/>
             <a:ext cx="4324418" cy="1304990"/>
           </a:xfrm>
           <a:prstGeom prst="rect">
@@ -4418,7 +4418,7 @@
         </p:nvSpPr>
         <p:spPr>
           <a:xfrm>
-            <a:off x="143108" y="2910246"/>
+            <a:off x="143108" y="3197122"/>
             <a:ext cx="4324418" cy="1660567"/>
           </a:xfrm>
           <a:prstGeom prst="rect">
@@ -4611,7 +4611,7 @@
         </p:nvSpPr>
         <p:spPr>
           <a:xfrm>
-            <a:off x="4558232" y="1401333"/>
+            <a:off x="4558232" y="1688209"/>
             <a:ext cx="4324418" cy="1081065"/>
           </a:xfrm>
           <a:prstGeom prst="rect">
@@ -4803,7 +4803,7 @@
         <p:spPr>
           <a:xfrm>
             <a:off x="121750" y="116632"/>
-            <a:ext cx="8647038" cy="859808"/>
+            <a:ext cx="8647038" cy="1141540"/>
           </a:xfrm>
           <a:prstGeom prst="wedgeRectCallout">
             <a:avLst>
@@ -4919,7 +4919,7 @@
         </p:nvSpPr>
         <p:spPr>
           <a:xfrm>
-            <a:off x="4607126" y="3173272"/>
+            <a:off x="4607126" y="3460148"/>
             <a:ext cx="4324418" cy="1081065"/>
           </a:xfrm>
           <a:prstGeom prst="rect">
@@ -4980,8 +4980,8 @@
         </p:nvSpPr>
         <p:spPr>
           <a:xfrm>
-            <a:off x="184140" y="540901"/>
-            <a:ext cx="8584648" cy="492443"/>
+            <a:off x="184140" y="514006"/>
+            <a:ext cx="8584648" cy="708808"/>
           </a:xfrm>
           <a:prstGeom prst="rect">
             <a:avLst/>
@@ -5016,9 +5016,9 @@
             </a:pPr>
             <a:r>
               <a:rPr lang="en-US" dirty="0"/>
-              <a:t>Forecasting number of airline passengers based on historical data</a:t>
+              <a:t>Forecast the number of airline passengers based on month-wise historical data from 1940-1960 (the sole feature in data), using an optimal time series model selected on the basis of minimal RMSE (at least &lt;30), within 3 weeks from start of analysis.</a:t>
             </a:r>
-            <a:endParaRPr sz="1400" b="1" i="0" u="none" strike="noStrike" cap="none" dirty="0">
+            <a:endParaRPr b="1" i="0" u="none" strike="noStrike" cap="none" dirty="0">
               <a:solidFill>
                 <a:srgbClr val="000000"/>
               </a:solidFill>
